--- a/docs/presentation.pptx
+++ b/docs/presentation.pptx
@@ -1147,7 +1147,7 @@
           <a:lstStyle/>
           <a:p>
             <a:r>
-              <a:t>CI GitHub Actions : job qualité (ruff + 78 tests) à chaque push/PR ; job d'évaluation (pipeline complet fetch → preprocess → build_index → evaluate) déclenchable manuellement, artefacts publiés. Sources dédupliquées par identifiant d'événement avant la réponse.</a:t>
+              <a:t>CI GitHub Actions : job qualité (ruff + 81 tests) à chaque push/PR ; job d'évaluation (pipeline complet fetch → preprocess → build_index → evaluate) déclenchable manuellement, artefacts publiés. Sources dédupliquées par identifiant d'événement avant la réponse.</a:t>
             </a:r>
           </a:p>
         </p:txBody>
@@ -1287,7 +1287,7 @@
           <a:lstStyle/>
           <a:p>
             <a:r>
-              <a:t>Jeu annoté à la main (20 questions, réponses fondées sur les événements réellement indexés). Métriques : similarité sémantique, couverture des infos clés, classification, Ragas. Renvoyer au rapport technique (docs/rapport_technique.md) ; assumer le recul sur les métriques (artefact hors-périmètre).</a:t>
+              <a:t>Jeu annoté (20 questions, réponses fondées sur les événements réellement indexés), réévalué sur les données rafraîchies (filtrage temporel désactivé pour la reproductibilité). Métriques : similarité, couverture, classification (+ Ragas en option). Période n=2 (1 question = 50 %). Assumer le recul sur le hors-périmètre (artefact de métrique).</a:t>
             </a:r>
           </a:p>
         </p:txBody>
@@ -6320,7 +6320,7 @@
                 </a:solidFill>
                 <a:latin typeface="Calibri"/>
               </a:rPr>
-              <a:t>78 tests automatisés (unitaires + API).</a:t>
+              <a:t>81 tests automatisés (unitaires + API).</a:t>
             </a:r>
           </a:p>
           <a:p>
@@ -7250,7 +7250,7 @@
                 </a:solidFill>
                 <a:latin typeface="Calibri"/>
               </a:rPr>
-              <a:t>0.71</a:t>
+              <a:t>0.77</a:t>
             </a:r>
           </a:p>
         </p:txBody>
@@ -7438,7 +7438,7 @@
                 </a:solidFill>
                 <a:latin typeface="Calibri"/>
               </a:rPr>
-              <a:t>0.88</a:t>
+              <a:t>0.71</a:t>
             </a:r>
           </a:p>
         </p:txBody>
@@ -7626,7 +7626,7 @@
                 </a:solidFill>
                 <a:latin typeface="Calibri"/>
               </a:rPr>
-              <a:t>16/20</a:t>
+              <a:t>14/20</a:t>
             </a:r>
           </a:p>
         </p:txBody>
@@ -7814,7 +7814,7 @@
                 </a:solidFill>
                 <a:latin typeface="Calibri"/>
               </a:rPr>
-              <a:t>100 %</a:t>
+              <a:t>20</a:t>
             </a:r>
           </a:p>
         </p:txBody>
@@ -7856,7 +7856,7 @@
                 </a:solidFill>
                 <a:latin typeface="Calibri"/>
               </a:rPr>
-              <a:t>Correct par</a:t>
+              <a:t>Questions</a:t>
             </a:r>
           </a:p>
           <a:p>
@@ -7875,7 +7875,7 @@
                 </a:solidFill>
                 <a:latin typeface="Calibri"/>
               </a:rPr>
-              <a:t>lieu &amp; période</a:t>
+              <a:t>annotées</a:t>
             </a:r>
           </a:p>
         </p:txBody>
@@ -7953,7 +7953,7 @@
                 </a:solidFill>
                 <a:latin typeface="Calibri"/>
               </a:rPr>
-              <a:t>Lieu</a:t>
+              <a:t>Lieu (n=5)</a:t>
             </a:r>
           </a:p>
         </p:txBody>
@@ -8011,7 +8011,7 @@
         <p:spPr>
           <a:xfrm>
             <a:off x="3154680" y="4206240"/>
-            <a:ext cx="2651760" cy="237744"/>
+            <a:ext cx="2121408" cy="237744"/>
           </a:xfrm>
           <a:prstGeom prst="rect">
             <a:avLst/>
@@ -8080,7 +8080,7 @@
                 </a:solidFill>
                 <a:latin typeface="Calibri"/>
               </a:rPr>
-              <a:t>100 %</a:t>
+              <a:t>80 %</a:t>
             </a:r>
           </a:p>
         </p:txBody>
@@ -8119,7 +8119,7 @@
                 </a:solidFill>
                 <a:latin typeface="Calibri"/>
               </a:rPr>
-              <a:t>Période</a:t>
+              <a:t>Période (n=2)</a:t>
             </a:r>
           </a:p>
         </p:txBody>
@@ -8177,7 +8177,7 @@
         <p:spPr>
           <a:xfrm>
             <a:off x="3154680" y="4681727"/>
-            <a:ext cx="2651760" cy="237744"/>
+            <a:ext cx="1325880" cy="237744"/>
           </a:xfrm>
           <a:prstGeom prst="rect">
             <a:avLst/>
@@ -8246,7 +8246,7 @@
                 </a:solidFill>
                 <a:latin typeface="Calibri"/>
               </a:rPr>
-              <a:t>100 %</a:t>
+              <a:t>50 %</a:t>
             </a:r>
           </a:p>
         </p:txBody>
@@ -8766,7 +8766,7 @@
                 </a:solidFill>
                 <a:latin typeface="Calibri"/>
               </a:rPr>
-              <a:t>Les 16/20 sont donc un plancher pessimiste ; détail complet dans le rapport technique.</a:t>
+              <a:t>Les 14/20 sont donc un plancher pessimiste ; détail complet dans le rapport technique.</a:t>
             </a:r>
           </a:p>
         </p:txBody>
@@ -9335,7 +9335,7 @@
                 </a:solidFill>
                 <a:latin typeface="Consolas"/>
               </a:rPr>
-              <a:t>├── tests/       78 tests (10 fichiers)</a:t>
+              <a:t>├── tests/       81 tests (10 fichiers)</a:t>
             </a:r>
           </a:p>
           <a:p>
@@ -15044,7 +15044,7 @@
                 </a:solidFill>
                 <a:latin typeface="Calibri"/>
               </a:rPr>
-              <a:t>4146</a:t>
+              <a:t>4076</a:t>
             </a:r>
           </a:p>
         </p:txBody>

--- a/docs/presentation.pptx
+++ b/docs/presentation.pptx
@@ -7,20 +7,20 @@
   <p:sldIdLst>
     <p:sldId id="256" r:id="rId7"/>
     <p:sldId id="257" r:id="rId8"/>
-    <p:sldId id="258" r:id="rId10"/>
-    <p:sldId id="259" r:id="rId11"/>
-    <p:sldId id="260" r:id="rId12"/>
-    <p:sldId id="261" r:id="rId13"/>
-    <p:sldId id="262" r:id="rId14"/>
-    <p:sldId id="263" r:id="rId15"/>
-    <p:sldId id="264" r:id="rId16"/>
-    <p:sldId id="265" r:id="rId17"/>
-    <p:sldId id="266" r:id="rId18"/>
-    <p:sldId id="267" r:id="rId19"/>
-    <p:sldId id="268" r:id="rId20"/>
-    <p:sldId id="269" r:id="rId21"/>
-    <p:sldId id="270" r:id="rId22"/>
-    <p:sldId id="271" r:id="rId23"/>
+    <p:sldId id="258" r:id="rId9"/>
+    <p:sldId id="259" r:id="rId10"/>
+    <p:sldId id="260" r:id="rId11"/>
+    <p:sldId id="261" r:id="rId12"/>
+    <p:sldId id="262" r:id="rId13"/>
+    <p:sldId id="263" r:id="rId14"/>
+    <p:sldId id="264" r:id="rId15"/>
+    <p:sldId id="265" r:id="rId16"/>
+    <p:sldId id="266" r:id="rId17"/>
+    <p:sldId id="267" r:id="rId18"/>
+    <p:sldId id="268" r:id="rId19"/>
+    <p:sldId id="269" r:id="rId20"/>
+    <p:sldId id="270" r:id="rId21"/>
+    <p:sldId id="271" r:id="rId22"/>
   </p:sldIdLst>
   <p:sldSz cx="12191695" cy="6858000" type="screen4x3"/>
   <p:notesSz cx="6858000" cy="9144000"/>
@@ -120,1196 +120,6 @@
     </a:lvl9pPr>
   </p:defaultTextStyle>
 </p:presentation>
-</file>
-
-<file path=ppt/notesMasters/notesMaster1.xml><?xml version="1.0" encoding="utf-8"?>
-<p:notesMaster xmlns:a="http://schemas.openxmlformats.org/drawingml/2006/main" xmlns:p="http://schemas.openxmlformats.org/presentationml/2006/main" xmlns:r="http://schemas.openxmlformats.org/officeDocument/2006/relationships">
-  <p:cSld>
-    <p:bg>
-      <p:bgRef idx="1001">
-        <a:schemeClr val="bg1"/>
-      </p:bgRef>
-    </p:bg>
-    <p:spTree>
-      <p:nvGrpSpPr>
-        <p:cNvPr id="1" name=""/>
-        <p:cNvGrpSpPr/>
-        <p:nvPr/>
-      </p:nvGrpSpPr>
-      <p:grpSpPr>
-        <a:xfrm>
-          <a:off x="0" y="0"/>
-          <a:ext cx="0" cy="0"/>
-          <a:chOff x="0" y="0"/>
-          <a:chExt cx="0" cy="0"/>
-        </a:xfrm>
-      </p:grpSpPr>
-      <p:sp>
-        <p:nvSpPr>
-          <p:cNvPr id="2" name="Header Placeholder 1"/>
-          <p:cNvSpPr>
-            <a:spLocks noGrp="1"/>
-          </p:cNvSpPr>
-          <p:nvPr>
-            <p:ph type="hdr" sz="quarter"/>
-          </p:nvPr>
-        </p:nvSpPr>
-        <p:spPr>
-          <a:xfrm>
-            <a:off x="0" y="0"/>
-            <a:ext cx="2971800" cy="457200"/>
-          </a:xfrm>
-          <a:prstGeom prst="rect">
-            <a:avLst/>
-          </a:prstGeom>
-        </p:spPr>
-        <p:txBody>
-          <a:bodyPr vert="horz" lIns="91440" tIns="45720" rIns="91440" bIns="45720" rtlCol="0"/>
-          <a:lstStyle>
-            <a:lvl1pPr algn="l">
-              <a:defRPr sz="1200"/>
-            </a:lvl1pPr>
-          </a:lstStyle>
-          <a:p>
-            <a:endParaRPr lang="en-US"/>
-          </a:p>
-        </p:txBody>
-      </p:sp>
-      <p:sp>
-        <p:nvSpPr>
-          <p:cNvPr id="3" name="Date Placeholder 2"/>
-          <p:cNvSpPr>
-            <a:spLocks noGrp="1"/>
-          </p:cNvSpPr>
-          <p:nvPr>
-            <p:ph type="dt" idx="1"/>
-          </p:nvPr>
-        </p:nvSpPr>
-        <p:spPr>
-          <a:xfrm>
-            <a:off x="3884613" y="0"/>
-            <a:ext cx="2971800" cy="457200"/>
-          </a:xfrm>
-          <a:prstGeom prst="rect">
-            <a:avLst/>
-          </a:prstGeom>
-        </p:spPr>
-        <p:txBody>
-          <a:bodyPr vert="horz" lIns="91440" tIns="45720" rIns="91440" bIns="45720" rtlCol="0"/>
-          <a:lstStyle>
-            <a:lvl1pPr algn="r">
-              <a:defRPr sz="1200"/>
-            </a:lvl1pPr>
-          </a:lstStyle>
-          <a:p>
-            <a:fld id="{0F89C1C7-3DCD-1040-A9CF-14679D8B5DDD}" type="datetimeFigureOut">
-              <a:rPr lang="en-US" smtClean="0"/>
-              <a:t>10/17/16</a:t>
-            </a:fld>
-            <a:endParaRPr lang="en-US"/>
-          </a:p>
-        </p:txBody>
-      </p:sp>
-      <p:sp>
-        <p:nvSpPr>
-          <p:cNvPr id="4" name="Slide Image Placeholder 3"/>
-          <p:cNvSpPr>
-            <a:spLocks noGrp="1" noRot="1" noChangeAspect="1"/>
-          </p:cNvSpPr>
-          <p:nvPr>
-            <p:ph type="sldImg" idx="2"/>
-          </p:nvPr>
-        </p:nvSpPr>
-        <p:spPr>
-          <a:xfrm>
-            <a:off x="1143000" y="685800"/>
-            <a:ext cx="4572000" cy="3429000"/>
-          </a:xfrm>
-          <a:prstGeom prst="rect">
-            <a:avLst/>
-          </a:prstGeom>
-          <a:noFill/>
-          <a:ln w="12700">
-            <a:solidFill>
-              <a:prstClr val="black"/>
-            </a:solidFill>
-          </a:ln>
-        </p:spPr>
-        <p:txBody>
-          <a:bodyPr vert="horz" lIns="91440" tIns="45720" rIns="91440" bIns="45720" rtlCol="0" anchor="ctr"/>
-          <a:lstStyle/>
-          <a:p>
-            <a:endParaRPr lang="en-US"/>
-          </a:p>
-        </p:txBody>
-      </p:sp>
-      <p:sp>
-        <p:nvSpPr>
-          <p:cNvPr id="5" name="Notes Placeholder 4"/>
-          <p:cNvSpPr>
-            <a:spLocks noGrp="1"/>
-          </p:cNvSpPr>
-          <p:nvPr>
-            <p:ph type="body" sz="quarter" idx="3"/>
-          </p:nvPr>
-        </p:nvSpPr>
-        <p:spPr>
-          <a:xfrm>
-            <a:off x="685800" y="4343400"/>
-            <a:ext cx="5486400" cy="4114800"/>
-          </a:xfrm>
-          <a:prstGeom prst="rect">
-            <a:avLst/>
-          </a:prstGeom>
-        </p:spPr>
-        <p:txBody>
-          <a:bodyPr vert="horz" lIns="91440" tIns="45720" rIns="91440" bIns="45720" rtlCol="0"/>
-          <a:lstStyle/>
-          <a:p>
-            <a:pPr lvl="0"/>
-            <a:r>
-              <a:rPr lang="en-US" smtClean="0"/>
-              <a:t>Click to edit Master text styles</a:t>
-            </a:r>
-          </a:p>
-          <a:p>
-            <a:pPr lvl="1"/>
-            <a:r>
-              <a:rPr lang="en-US" smtClean="0"/>
-              <a:t>Second level</a:t>
-            </a:r>
-          </a:p>
-          <a:p>
-            <a:pPr lvl="2"/>
-            <a:r>
-              <a:rPr lang="en-US" smtClean="0"/>
-              <a:t>Third level</a:t>
-            </a:r>
-          </a:p>
-          <a:p>
-            <a:pPr lvl="3"/>
-            <a:r>
-              <a:rPr lang="en-US" smtClean="0"/>
-              <a:t>Fourth level</a:t>
-            </a:r>
-          </a:p>
-          <a:p>
-            <a:pPr lvl="4"/>
-            <a:r>
-              <a:rPr lang="en-US" smtClean="0"/>
-              <a:t>Fifth level</a:t>
-            </a:r>
-            <a:endParaRPr lang="en-US"/>
-          </a:p>
-        </p:txBody>
-      </p:sp>
-      <p:sp>
-        <p:nvSpPr>
-          <p:cNvPr id="6" name="Footer Placeholder 5"/>
-          <p:cNvSpPr>
-            <a:spLocks noGrp="1"/>
-          </p:cNvSpPr>
-          <p:nvPr>
-            <p:ph type="ftr" sz="quarter" idx="4"/>
-          </p:nvPr>
-        </p:nvSpPr>
-        <p:spPr>
-          <a:xfrm>
-            <a:off x="0" y="8685213"/>
-            <a:ext cx="2971800" cy="457200"/>
-          </a:xfrm>
-          <a:prstGeom prst="rect">
-            <a:avLst/>
-          </a:prstGeom>
-        </p:spPr>
-        <p:txBody>
-          <a:bodyPr vert="horz" lIns="91440" tIns="45720" rIns="91440" bIns="45720" rtlCol="0" anchor="b"/>
-          <a:lstStyle>
-            <a:lvl1pPr algn="l">
-              <a:defRPr sz="1200"/>
-            </a:lvl1pPr>
-          </a:lstStyle>
-          <a:p>
-            <a:endParaRPr lang="en-US"/>
-          </a:p>
-        </p:txBody>
-      </p:sp>
-      <p:sp>
-        <p:nvSpPr>
-          <p:cNvPr id="7" name="Slide Number Placeholder 6"/>
-          <p:cNvSpPr>
-            <a:spLocks noGrp="1"/>
-          </p:cNvSpPr>
-          <p:nvPr>
-            <p:ph type="sldNum" sz="quarter" idx="5"/>
-          </p:nvPr>
-        </p:nvSpPr>
-        <p:spPr>
-          <a:xfrm>
-            <a:off x="3884613" y="8685213"/>
-            <a:ext cx="2971800" cy="457200"/>
-          </a:xfrm>
-          <a:prstGeom prst="rect">
-            <a:avLst/>
-          </a:prstGeom>
-        </p:spPr>
-        <p:txBody>
-          <a:bodyPr vert="horz" lIns="91440" tIns="45720" rIns="91440" bIns="45720" rtlCol="0" anchor="b"/>
-          <a:lstStyle>
-            <a:lvl1pPr algn="r">
-              <a:defRPr sz="1200"/>
-            </a:lvl1pPr>
-          </a:lstStyle>
-          <a:p>
-            <a:fld id="{BB5E49A5-4136-284D-997B-48E1D791AD67}" type="slidenum">
-              <a:rPr lang="en-US" smtClean="0"/>
-              <a:t>‹#›</a:t>
-            </a:fld>
-            <a:endParaRPr lang="en-US"/>
-          </a:p>
-        </p:txBody>
-      </p:sp>
-    </p:spTree>
-    <p:extLst>
-      <p:ext uri="{BB962C8B-B14F-4D97-AF65-F5344CB8AC3E}">
-        <p14:creationId xmlns:p14="http://schemas.microsoft.com/office/powerpoint/2010/main" val="2623252185"/>
-      </p:ext>
-    </p:extLst>
-  </p:cSld>
-  <p:clrMap bg1="lt1" tx1="dk1" bg2="lt2" tx2="dk2" accent1="accent1" accent2="accent2" accent3="accent3" accent4="accent4" accent5="accent5" accent6="accent6" hlink="hlink" folHlink="folHlink"/>
-  <p:notesStyle>
-    <a:lvl1pPr marL="0" algn="l" defTabSz="457200" rtl="0" eaLnBrk="1" latinLnBrk="0" hangingPunct="1">
-      <a:defRPr sz="1200" kern="1200">
-        <a:solidFill>
-          <a:schemeClr val="tx1"/>
-        </a:solidFill>
-        <a:latin typeface="+mn-lt"/>
-        <a:ea typeface="+mn-ea"/>
-        <a:cs typeface="+mn-cs"/>
-      </a:defRPr>
-    </a:lvl1pPr>
-    <a:lvl2pPr marL="457200" algn="l" defTabSz="457200" rtl="0" eaLnBrk="1" latinLnBrk="0" hangingPunct="1">
-      <a:defRPr sz="1200" kern="1200">
-        <a:solidFill>
-          <a:schemeClr val="tx1"/>
-        </a:solidFill>
-        <a:latin typeface="+mn-lt"/>
-        <a:ea typeface="+mn-ea"/>
-        <a:cs typeface="+mn-cs"/>
-      </a:defRPr>
-    </a:lvl2pPr>
-    <a:lvl3pPr marL="914400" algn="l" defTabSz="457200" rtl="0" eaLnBrk="1" latinLnBrk="0" hangingPunct="1">
-      <a:defRPr sz="1200" kern="1200">
-        <a:solidFill>
-          <a:schemeClr val="tx1"/>
-        </a:solidFill>
-        <a:latin typeface="+mn-lt"/>
-        <a:ea typeface="+mn-ea"/>
-        <a:cs typeface="+mn-cs"/>
-      </a:defRPr>
-    </a:lvl3pPr>
-    <a:lvl4pPr marL="1371600" algn="l" defTabSz="457200" rtl="0" eaLnBrk="1" latinLnBrk="0" hangingPunct="1">
-      <a:defRPr sz="1200" kern="1200">
-        <a:solidFill>
-          <a:schemeClr val="tx1"/>
-        </a:solidFill>
-        <a:latin typeface="+mn-lt"/>
-        <a:ea typeface="+mn-ea"/>
-        <a:cs typeface="+mn-cs"/>
-      </a:defRPr>
-    </a:lvl4pPr>
-    <a:lvl5pPr marL="1828800" algn="l" defTabSz="457200" rtl="0" eaLnBrk="1" latinLnBrk="0" hangingPunct="1">
-      <a:defRPr sz="1200" kern="1200">
-        <a:solidFill>
-          <a:schemeClr val="tx1"/>
-        </a:solidFill>
-        <a:latin typeface="+mn-lt"/>
-        <a:ea typeface="+mn-ea"/>
-        <a:cs typeface="+mn-cs"/>
-      </a:defRPr>
-    </a:lvl5pPr>
-    <a:lvl6pPr marL="2286000" algn="l" defTabSz="457200" rtl="0" eaLnBrk="1" latinLnBrk="0" hangingPunct="1">
-      <a:defRPr sz="1200" kern="1200">
-        <a:solidFill>
-          <a:schemeClr val="tx1"/>
-        </a:solidFill>
-        <a:latin typeface="+mn-lt"/>
-        <a:ea typeface="+mn-ea"/>
-        <a:cs typeface="+mn-cs"/>
-      </a:defRPr>
-    </a:lvl6pPr>
-    <a:lvl7pPr marL="2743200" algn="l" defTabSz="457200" rtl="0" eaLnBrk="1" latinLnBrk="0" hangingPunct="1">
-      <a:defRPr sz="1200" kern="1200">
-        <a:solidFill>
-          <a:schemeClr val="tx1"/>
-        </a:solidFill>
-        <a:latin typeface="+mn-lt"/>
-        <a:ea typeface="+mn-ea"/>
-        <a:cs typeface="+mn-cs"/>
-      </a:defRPr>
-    </a:lvl7pPr>
-    <a:lvl8pPr marL="3200400" algn="l" defTabSz="457200" rtl="0" eaLnBrk="1" latinLnBrk="0" hangingPunct="1">
-      <a:defRPr sz="1200" kern="1200">
-        <a:solidFill>
-          <a:schemeClr val="tx1"/>
-        </a:solidFill>
-        <a:latin typeface="+mn-lt"/>
-        <a:ea typeface="+mn-ea"/>
-        <a:cs typeface="+mn-cs"/>
-      </a:defRPr>
-    </a:lvl8pPr>
-    <a:lvl9pPr marL="3657600" algn="l" defTabSz="457200" rtl="0" eaLnBrk="1" latinLnBrk="0" hangingPunct="1">
-      <a:defRPr sz="1200" kern="1200">
-        <a:solidFill>
-          <a:schemeClr val="tx1"/>
-        </a:solidFill>
-        <a:latin typeface="+mn-lt"/>
-        <a:ea typeface="+mn-ea"/>
-        <a:cs typeface="+mn-cs"/>
-      </a:defRPr>
-    </a:lvl9pPr>
-  </p:notesStyle>
-</p:notesMaster>
-</file>
-
-<file path=ppt/notesSlides/notesSlide1.xml><?xml version="1.0" encoding="utf-8"?>
-<p:notes xmlns:a="http://schemas.openxmlformats.org/drawingml/2006/main" xmlns:p="http://schemas.openxmlformats.org/presentationml/2006/main" xmlns:r="http://schemas.openxmlformats.org/officeDocument/2006/relationships">
-  <p:cSld>
-    <p:spTree>
-      <p:nvGrpSpPr>
-        <p:cNvPr id="1" name=""/>
-        <p:cNvGrpSpPr/>
-        <p:nvPr/>
-      </p:nvGrpSpPr>
-      <p:grpSpPr>
-        <a:xfrm>
-          <a:off x="0" y="0"/>
-          <a:ext cx="0" cy="0"/>
-          <a:chOff x="0" y="0"/>
-          <a:chExt cx="0" cy="0"/>
-        </a:xfrm>
-      </p:grpSpPr>
-      <p:sp>
-        <p:nvSpPr>
-          <p:cNvPr id="2" name="Slide Image Placeholder 1"/>
-          <p:cNvSpPr>
-            <a:spLocks noGrp="1"/>
-          </p:cNvSpPr>
-          <p:nvPr>
-            <p:ph type="sldImg" idx="2"/>
-          </p:nvPr>
-        </p:nvSpPr>
-        <p:spPr/>
-      </p:sp>
-      <p:sp>
-        <p:nvSpPr>
-          <p:cNvPr id="3" name="Notes Placeholder 2"/>
-          <p:cNvSpPr>
-            <a:spLocks noGrp="1"/>
-          </p:cNvSpPr>
-          <p:nvPr>
-            <p:ph type="body" idx="3" sz="quarter"/>
-          </p:nvPr>
-        </p:nvSpPr>
-        <p:spPr/>
-        <p:txBody>
-          <a:bodyPr/>
-          <a:lstStyle/>
-          <a:p>
-            <a:r>
-              <a:t>Annoncer le plan calqué sur les 4 livrables attendus, puis la discussion.</a:t>
-            </a:r>
-          </a:p>
-        </p:txBody>
-      </p:sp>
-      <p:sp>
-        <p:nvSpPr>
-          <p:cNvPr id="4" name="Slide Number Placeholder 3"/>
-          <p:cNvSpPr>
-            <a:spLocks noGrp="1"/>
-          </p:cNvSpPr>
-          <p:nvPr>
-            <p:ph type="sldNum" idx="5" sz="quarter"/>
-          </p:nvPr>
-        </p:nvSpPr>
-        <p:spPr/>
-      </p:sp>
-    </p:spTree>
-  </p:cSld>
-  <p:clrMapOvr>
-    <a:masterClrMapping/>
-  </p:clrMapOvr>
-</p:notes>
-</file>
-
-<file path=ppt/notesSlides/notesSlide10.xml><?xml version="1.0" encoding="utf-8"?>
-<p:notes xmlns:a="http://schemas.openxmlformats.org/drawingml/2006/main" xmlns:p="http://schemas.openxmlformats.org/presentationml/2006/main" xmlns:r="http://schemas.openxmlformats.org/officeDocument/2006/relationships">
-  <p:cSld>
-    <p:spTree>
-      <p:nvGrpSpPr>
-        <p:cNvPr id="1" name=""/>
-        <p:cNvGrpSpPr/>
-        <p:nvPr/>
-      </p:nvGrpSpPr>
-      <p:grpSpPr>
-        <a:xfrm>
-          <a:off x="0" y="0"/>
-          <a:ext cx="0" cy="0"/>
-          <a:chOff x="0" y="0"/>
-          <a:chExt cx="0" cy="0"/>
-        </a:xfrm>
-      </p:grpSpPr>
-      <p:sp>
-        <p:nvSpPr>
-          <p:cNvPr id="2" name="Slide Image Placeholder 1"/>
-          <p:cNvSpPr>
-            <a:spLocks noGrp="1"/>
-          </p:cNvSpPr>
-          <p:nvPr>
-            <p:ph type="sldImg" idx="2"/>
-          </p:nvPr>
-        </p:nvSpPr>
-        <p:spPr/>
-      </p:sp>
-      <p:sp>
-        <p:nvSpPr>
-          <p:cNvPr id="3" name="Notes Placeholder 2"/>
-          <p:cNvSpPr>
-            <a:spLocks noGrp="1"/>
-          </p:cNvSpPr>
-          <p:nvPr>
-            <p:ph type="body" idx="3" sz="quarter"/>
-          </p:nvPr>
-        </p:nvSpPr>
-        <p:spPr/>
-        <p:txBody>
-          <a:bodyPr/>
-          <a:lstStyle/>
-          <a:p>
-            <a:r>
-              <a:t>Parcourir le dépôt en direct sur GitHub : montrer rag/ (métier) vs api/ (HTTP), puis dérouler le pipeline scripts/ (fetch → preprocess → build_index) et les outils.</a:t>
-            </a:r>
-          </a:p>
-        </p:txBody>
-      </p:sp>
-      <p:sp>
-        <p:nvSpPr>
-          <p:cNvPr id="4" name="Slide Number Placeholder 3"/>
-          <p:cNvSpPr>
-            <a:spLocks noGrp="1"/>
-          </p:cNvSpPr>
-          <p:nvPr>
-            <p:ph type="sldNum" idx="5" sz="quarter"/>
-          </p:nvPr>
-        </p:nvSpPr>
-        <p:spPr/>
-      </p:sp>
-    </p:spTree>
-  </p:cSld>
-  <p:clrMapOvr>
-    <a:masterClrMapping/>
-  </p:clrMapOvr>
-</p:notes>
-</file>
-
-<file path=ppt/notesSlides/notesSlide11.xml><?xml version="1.0" encoding="utf-8"?>
-<p:notes xmlns:a="http://schemas.openxmlformats.org/drawingml/2006/main" xmlns:p="http://schemas.openxmlformats.org/presentationml/2006/main" xmlns:r="http://schemas.openxmlformats.org/officeDocument/2006/relationships">
-  <p:cSld>
-    <p:spTree>
-      <p:nvGrpSpPr>
-        <p:cNvPr id="1" name=""/>
-        <p:cNvGrpSpPr/>
-        <p:nvPr/>
-      </p:nvGrpSpPr>
-      <p:grpSpPr>
-        <a:xfrm>
-          <a:off x="0" y="0"/>
-          <a:ext cx="0" cy="0"/>
-          <a:chOff x="0" y="0"/>
-          <a:chExt cx="0" cy="0"/>
-        </a:xfrm>
-      </p:grpSpPr>
-      <p:sp>
-        <p:nvSpPr>
-          <p:cNvPr id="2" name="Slide Image Placeholder 1"/>
-          <p:cNvSpPr>
-            <a:spLocks noGrp="1"/>
-          </p:cNvSpPr>
-          <p:nvPr>
-            <p:ph type="sldImg" idx="2"/>
-          </p:nvPr>
-        </p:nvSpPr>
-        <p:spPr/>
-      </p:sp>
-      <p:sp>
-        <p:nvSpPr>
-          <p:cNvPr id="3" name="Notes Placeholder 2"/>
-          <p:cNvSpPr>
-            <a:spLocks noGrp="1"/>
-          </p:cNvSpPr>
-          <p:nvPr>
-            <p:ph type="body" idx="3" sz="quarter"/>
-          </p:nvPr>
-        </p:nvSpPr>
-        <p:spPr/>
-        <p:txBody>
-          <a:bodyPr/>
-          <a:lstStyle/>
-          <a:p>
-            <a:r>
-              <a:t>Reproductibilité (axe industrialisation) : uv.lock + .python-version figent les versions → installs déterministes. Secrets hors dépôt et hors image ; côté CI, stockés dans GitHub Secrets. Pipeline d'indexation rejouable de zéro (fetch → preprocess → build_index).</a:t>
-            </a:r>
-          </a:p>
-        </p:txBody>
-      </p:sp>
-      <p:sp>
-        <p:nvSpPr>
-          <p:cNvPr id="4" name="Slide Number Placeholder 3"/>
-          <p:cNvSpPr>
-            <a:spLocks noGrp="1"/>
-          </p:cNvSpPr>
-          <p:nvPr>
-            <p:ph type="sldNum" idx="5" sz="quarter"/>
-          </p:nvPr>
-        </p:nvSpPr>
-        <p:spPr/>
-      </p:sp>
-    </p:spTree>
-  </p:cSld>
-  <p:clrMapOvr>
-    <a:masterClrMapping/>
-  </p:clrMapOvr>
-</p:notes>
-</file>
-
-<file path=ppt/notesSlides/notesSlide12.xml><?xml version="1.0" encoding="utf-8"?>
-<p:notes xmlns:a="http://schemas.openxmlformats.org/drawingml/2006/main" xmlns:p="http://schemas.openxmlformats.org/presentationml/2006/main" xmlns:r="http://schemas.openxmlformats.org/officeDocument/2006/relationships">
-  <p:cSld>
-    <p:spTree>
-      <p:nvGrpSpPr>
-        <p:cNvPr id="1" name=""/>
-        <p:cNvGrpSpPr/>
-        <p:nvPr/>
-      </p:nvGrpSpPr>
-      <p:grpSpPr>
-        <a:xfrm>
-          <a:off x="0" y="0"/>
-          <a:ext cx="0" cy="0"/>
-          <a:chOff x="0" y="0"/>
-          <a:chExt cx="0" cy="0"/>
-        </a:xfrm>
-      </p:grpSpPr>
-      <p:sp>
-        <p:nvSpPr>
-          <p:cNvPr id="2" name="Slide Image Placeholder 1"/>
-          <p:cNvSpPr>
-            <a:spLocks noGrp="1"/>
-          </p:cNvSpPr>
-          <p:nvPr>
-            <p:ph type="sldImg" idx="2"/>
-          </p:nvPr>
-        </p:nvSpPr>
-        <p:spPr/>
-      </p:sp>
-      <p:sp>
-        <p:nvSpPr>
-          <p:cNvPr id="3" name="Notes Placeholder 2"/>
-          <p:cNvSpPr>
-            <a:spLocks noGrp="1"/>
-          </p:cNvSpPr>
-          <p:nvPr>
-            <p:ph type="body" idx="3" sz="quarter"/>
-          </p:nvPr>
-        </p:nvSpPr>
-        <p:spPr/>
-        <p:txBody>
-          <a:bodyPr/>
-          <a:lstStyle/>
-          <a:p>
-            <a:r>
-              <a:t>Assumer les limites ouvertement (axe « limites de la solution actuelle ») et montrer que chacune a une piste d'industrialisation concrète — c'est l'axe « reproductibilité / industrialisation ».</a:t>
-            </a:r>
-          </a:p>
-        </p:txBody>
-      </p:sp>
-      <p:sp>
-        <p:nvSpPr>
-          <p:cNvPr id="4" name="Slide Number Placeholder 3"/>
-          <p:cNvSpPr>
-            <a:spLocks noGrp="1"/>
-          </p:cNvSpPr>
-          <p:nvPr>
-            <p:ph type="sldNum" idx="5" sz="quarter"/>
-          </p:nvPr>
-        </p:nvSpPr>
-        <p:spPr/>
-      </p:sp>
-    </p:spTree>
-  </p:cSld>
-  <p:clrMapOvr>
-    <a:masterClrMapping/>
-  </p:clrMapOvr>
-</p:notes>
-</file>
-
-<file path=ppt/notesSlides/notesSlide2.xml><?xml version="1.0" encoding="utf-8"?>
-<p:notes xmlns:a="http://schemas.openxmlformats.org/drawingml/2006/main" xmlns:p="http://schemas.openxmlformats.org/presentationml/2006/main" xmlns:r="http://schemas.openxmlformats.org/officeDocument/2006/relationships">
-  <p:cSld>
-    <p:spTree>
-      <p:nvGrpSpPr>
-        <p:cNvPr id="1" name=""/>
-        <p:cNvGrpSpPr/>
-        <p:nvPr/>
-      </p:nvGrpSpPr>
-      <p:grpSpPr>
-        <a:xfrm>
-          <a:off x="0" y="0"/>
-          <a:ext cx="0" cy="0"/>
-          <a:chOff x="0" y="0"/>
-          <a:chExt cx="0" cy="0"/>
-        </a:xfrm>
-      </p:grpSpPr>
-      <p:sp>
-        <p:nvSpPr>
-          <p:cNvPr id="2" name="Slide Image Placeholder 1"/>
-          <p:cNvSpPr>
-            <a:spLocks noGrp="1"/>
-          </p:cNvSpPr>
-          <p:nvPr>
-            <p:ph type="sldImg" idx="2"/>
-          </p:nvPr>
-        </p:nvSpPr>
-        <p:spPr/>
-      </p:sp>
-      <p:sp>
-        <p:nvSpPr>
-          <p:cNvPr id="3" name="Notes Placeholder 2"/>
-          <p:cNvSpPr>
-            <a:spLocks noGrp="1"/>
-          </p:cNvSpPr>
-          <p:nvPr>
-            <p:ph type="body" idx="3" sz="quarter"/>
-          </p:nvPr>
-        </p:nvSpPr>
-        <p:spPr/>
-        <p:txBody>
-          <a:bodyPr/>
-          <a:lstStyle/>
-          <a:p>
-            <a:r>
-              <a:t>Poser le décor métier avant la technique : à qui sert l'assistant et pourquoi.</a:t>
-            </a:r>
-          </a:p>
-        </p:txBody>
-      </p:sp>
-      <p:sp>
-        <p:nvSpPr>
-          <p:cNvPr id="4" name="Slide Number Placeholder 3"/>
-          <p:cNvSpPr>
-            <a:spLocks noGrp="1"/>
-          </p:cNvSpPr>
-          <p:nvPr>
-            <p:ph type="sldNum" idx="5" sz="quarter"/>
-          </p:nvPr>
-        </p:nvSpPr>
-        <p:spPr/>
-      </p:sp>
-    </p:spTree>
-  </p:cSld>
-  <p:clrMapOvr>
-    <a:masterClrMapping/>
-  </p:clrMapOvr>
-</p:notes>
-</file>
-
-<file path=ppt/notesSlides/notesSlide3.xml><?xml version="1.0" encoding="utf-8"?>
-<p:notes xmlns:a="http://schemas.openxmlformats.org/drawingml/2006/main" xmlns:p="http://schemas.openxmlformats.org/presentationml/2006/main" xmlns:r="http://schemas.openxmlformats.org/officeDocument/2006/relationships">
-  <p:cSld>
-    <p:spTree>
-      <p:nvGrpSpPr>
-        <p:cNvPr id="1" name=""/>
-        <p:cNvGrpSpPr/>
-        <p:nvPr/>
-      </p:nvGrpSpPr>
-      <p:grpSpPr>
-        <a:xfrm>
-          <a:off x="0" y="0"/>
-          <a:ext cx="0" cy="0"/>
-          <a:chOff x="0" y="0"/>
-          <a:chExt cx="0" cy="0"/>
-        </a:xfrm>
-      </p:grpSpPr>
-      <p:sp>
-        <p:nvSpPr>
-          <p:cNvPr id="2" name="Slide Image Placeholder 1"/>
-          <p:cNvSpPr>
-            <a:spLocks noGrp="1"/>
-          </p:cNvSpPr>
-          <p:nvPr>
-            <p:ph type="sldImg" idx="2"/>
-          </p:nvPr>
-        </p:nvSpPr>
-        <p:spPr/>
-      </p:sp>
-      <p:sp>
-        <p:nvSpPr>
-          <p:cNvPr id="3" name="Notes Placeholder 2"/>
-          <p:cNvSpPr>
-            <a:spLocks noGrp="1"/>
-          </p:cNvSpPr>
-          <p:nvPr>
-            <p:ph type="body" idx="3" sz="quarter"/>
-          </p:nvPr>
-        </p:nvSpPr>
-        <p:spPr/>
-        <p:txBody>
-          <a:bodyPr/>
-          <a:lstStyle/>
-          <a:p>
-            <a:r>
-              <a:t>Analogie : répondre avec la fiche sous les yeux plutôt que de mémoire.</a:t>
-            </a:r>
-          </a:p>
-        </p:txBody>
-      </p:sp>
-      <p:sp>
-        <p:nvSpPr>
-          <p:cNvPr id="4" name="Slide Number Placeholder 3"/>
-          <p:cNvSpPr>
-            <a:spLocks noGrp="1"/>
-          </p:cNvSpPr>
-          <p:nvPr>
-            <p:ph type="sldNum" idx="5" sz="quarter"/>
-          </p:nvPr>
-        </p:nvSpPr>
-        <p:spPr/>
-      </p:sp>
-    </p:spTree>
-  </p:cSld>
-  <p:clrMapOvr>
-    <a:masterClrMapping/>
-  </p:clrMapOvr>
-</p:notes>
-</file>
-
-<file path=ppt/notesSlides/notesSlide4.xml><?xml version="1.0" encoding="utf-8"?>
-<p:notes xmlns:a="http://schemas.openxmlformats.org/drawingml/2006/main" xmlns:p="http://schemas.openxmlformats.org/presentationml/2006/main" xmlns:r="http://schemas.openxmlformats.org/officeDocument/2006/relationships">
-  <p:cSld>
-    <p:spTree>
-      <p:nvGrpSpPr>
-        <p:cNvPr id="1" name=""/>
-        <p:cNvGrpSpPr/>
-        <p:nvPr/>
-      </p:nvGrpSpPr>
-      <p:grpSpPr>
-        <a:xfrm>
-          <a:off x="0" y="0"/>
-          <a:ext cx="0" cy="0"/>
-          <a:chOff x="0" y="0"/>
-          <a:chExt cx="0" cy="0"/>
-        </a:xfrm>
-      </p:grpSpPr>
-      <p:sp>
-        <p:nvSpPr>
-          <p:cNvPr id="2" name="Slide Image Placeholder 1"/>
-          <p:cNvSpPr>
-            <a:spLocks noGrp="1"/>
-          </p:cNvSpPr>
-          <p:nvPr>
-            <p:ph type="sldImg" idx="2"/>
-          </p:nvPr>
-        </p:nvSpPr>
-        <p:spPr/>
-      </p:sp>
-      <p:sp>
-        <p:nvSpPr>
-          <p:cNvPr id="3" name="Notes Placeholder 2"/>
-          <p:cNvSpPr>
-            <a:spLocks noGrp="1"/>
-          </p:cNvSpPr>
-          <p:nvPr>
-            <p:ph type="body" idx="3" sz="quarter"/>
-          </p:nvPr>
-        </p:nvSpPr>
-        <p:spPr/>
-        <p:txBody>
-          <a:bodyPr/>
-          <a:lstStyle/>
-          <a:p>
-            <a:r>
-              <a:t>Insister sur les deux temps (indexation hors-ligne vs interrogation temps réel), le maillon partagé qu'est l'index FAISS, et le chargement unique des modèles au démarrage (performance).</a:t>
-            </a:r>
-          </a:p>
-        </p:txBody>
-      </p:sp>
-      <p:sp>
-        <p:nvSpPr>
-          <p:cNvPr id="4" name="Slide Number Placeholder 3"/>
-          <p:cNvSpPr>
-            <a:spLocks noGrp="1"/>
-          </p:cNvSpPr>
-          <p:nvPr>
-            <p:ph type="sldNum" idx="5" sz="quarter"/>
-          </p:nvPr>
-        </p:nvSpPr>
-        <p:spPr/>
-      </p:sp>
-    </p:spTree>
-  </p:cSld>
-  <p:clrMapOvr>
-    <a:masterClrMapping/>
-  </p:clrMapOvr>
-</p:notes>
-</file>
-
-<file path=ppt/notesSlides/notesSlide5.xml><?xml version="1.0" encoding="utf-8"?>
-<p:notes xmlns:a="http://schemas.openxmlformats.org/drawingml/2006/main" xmlns:p="http://schemas.openxmlformats.org/presentationml/2006/main" xmlns:r="http://schemas.openxmlformats.org/officeDocument/2006/relationships">
-  <p:cSld>
-    <p:spTree>
-      <p:nvGrpSpPr>
-        <p:cNvPr id="1" name=""/>
-        <p:cNvGrpSpPr/>
-        <p:nvPr/>
-      </p:nvGrpSpPr>
-      <p:grpSpPr>
-        <a:xfrm>
-          <a:off x="0" y="0"/>
-          <a:ext cx="0" cy="0"/>
-          <a:chOff x="0" y="0"/>
-          <a:chExt cx="0" cy="0"/>
-        </a:xfrm>
-      </p:grpSpPr>
-      <p:sp>
-        <p:nvSpPr>
-          <p:cNvPr id="2" name="Slide Image Placeholder 1"/>
-          <p:cNvSpPr>
-            <a:spLocks noGrp="1"/>
-          </p:cNvSpPr>
-          <p:nvPr>
-            <p:ph type="sldImg" idx="2"/>
-          </p:nvPr>
-        </p:nvSpPr>
-        <p:spPr/>
-      </p:sp>
-      <p:sp>
-        <p:nvSpPr>
-          <p:cNvPr id="3" name="Notes Placeholder 2"/>
-          <p:cNvSpPr>
-            <a:spLocks noGrp="1"/>
-          </p:cNvSpPr>
-          <p:nvPr>
-            <p:ph type="body" idx="3" sz="quarter"/>
-          </p:nvPr>
-        </p:nvSpPr>
-        <p:spPr/>
-        <p:txBody>
-          <a:bodyPr/>
-          <a:lstStyle/>
-          <a:p>
-            <a:r>
-              <a:t>C'est l'axe « gestion des données » de la discussion. Insister sur l'ingénierie réelle : contournement du 403 (fetch par agendas + re-filtrage ville), bug de pagination corrigé (curseur au lieu d'offset), gestion des manques et du biais thématique. ~1500 événements, médiane ~1000 caractères/événement.</a:t>
-            </a:r>
-          </a:p>
-        </p:txBody>
-      </p:sp>
-      <p:sp>
-        <p:nvSpPr>
-          <p:cNvPr id="4" name="Slide Number Placeholder 3"/>
-          <p:cNvSpPr>
-            <a:spLocks noGrp="1"/>
-          </p:cNvSpPr>
-          <p:nvPr>
-            <p:ph type="sldNum" idx="5" sz="quarter"/>
-          </p:nvPr>
-        </p:nvSpPr>
-        <p:spPr/>
-      </p:sp>
-    </p:spTree>
-  </p:cSld>
-  <p:clrMapOvr>
-    <a:masterClrMapping/>
-  </p:clrMapOvr>
-</p:notes>
-</file>
-
-<file path=ppt/notesSlides/notesSlide6.xml><?xml version="1.0" encoding="utf-8"?>
-<p:notes xmlns:a="http://schemas.openxmlformats.org/drawingml/2006/main" xmlns:p="http://schemas.openxmlformats.org/presentationml/2006/main" xmlns:r="http://schemas.openxmlformats.org/officeDocument/2006/relationships">
-  <p:cSld>
-    <p:spTree>
-      <p:nvGrpSpPr>
-        <p:cNvPr id="1" name=""/>
-        <p:cNvGrpSpPr/>
-        <p:nvPr/>
-      </p:nvGrpSpPr>
-      <p:grpSpPr>
-        <a:xfrm>
-          <a:off x="0" y="0"/>
-          <a:ext cx="0" cy="0"/>
-          <a:chOff x="0" y="0"/>
-          <a:chExt cx="0" cy="0"/>
-        </a:xfrm>
-      </p:grpSpPr>
-      <p:sp>
-        <p:nvSpPr>
-          <p:cNvPr id="2" name="Slide Image Placeholder 1"/>
-          <p:cNvSpPr>
-            <a:spLocks noGrp="1"/>
-          </p:cNvSpPr>
-          <p:nvPr>
-            <p:ph type="sldImg" idx="2"/>
-          </p:nvPr>
-        </p:nvSpPr>
-        <p:spPr/>
-      </p:sp>
-      <p:sp>
-        <p:nvSpPr>
-          <p:cNvPr id="3" name="Notes Placeholder 2"/>
-          <p:cNvSpPr>
-            <a:spLocks noGrp="1"/>
-          </p:cNvSpPr>
-          <p:nvPr>
-            <p:ph type="body" idx="3" sz="quarter"/>
-          </p:nvPr>
-        </p:nvSpPr>
-        <p:spPr/>
-        <p:txBody>
-          <a:bodyPr/>
-          <a:lstStyle/>
-          <a:p>
-            <a:r>
-              <a:t>Le gating est un argument fort : honnêteté du système et économie d'appels API. Détails si challengé (axe « choix de modèle ») : top-k = 4 passages récupérés, température 0.2 (réponses factuelles et reproductibles), seuil cosinus ≈ 0,9. Embeddings en local (≠ API Mistral) pour le coût, la reproductibilité et la confidentialité ; Mistral réservé à la génération.</a:t>
-            </a:r>
-          </a:p>
-        </p:txBody>
-      </p:sp>
-      <p:sp>
-        <p:nvSpPr>
-          <p:cNvPr id="4" name="Slide Number Placeholder 3"/>
-          <p:cNvSpPr>
-            <a:spLocks noGrp="1"/>
-          </p:cNvSpPr>
-          <p:nvPr>
-            <p:ph type="sldNum" idx="5" sz="quarter"/>
-          </p:nvPr>
-        </p:nvSpPr>
-        <p:spPr/>
-      </p:sp>
-    </p:spTree>
-  </p:cSld>
-  <p:clrMapOvr>
-    <a:masterClrMapping/>
-  </p:clrMapOvr>
-</p:notes>
-</file>
-
-<file path=ppt/notesSlides/notesSlide7.xml><?xml version="1.0" encoding="utf-8"?>
-<p:notes xmlns:a="http://schemas.openxmlformats.org/drawingml/2006/main" xmlns:p="http://schemas.openxmlformats.org/presentationml/2006/main" xmlns:r="http://schemas.openxmlformats.org/officeDocument/2006/relationships">
-  <p:cSld>
-    <p:spTree>
-      <p:nvGrpSpPr>
-        <p:cNvPr id="1" name=""/>
-        <p:cNvGrpSpPr/>
-        <p:nvPr/>
-      </p:nvGrpSpPr>
-      <p:grpSpPr>
-        <a:xfrm>
-          <a:off x="0" y="0"/>
-          <a:ext cx="0" cy="0"/>
-          <a:chOff x="0" y="0"/>
-          <a:chExt cx="0" cy="0"/>
-        </a:xfrm>
-      </p:grpSpPr>
-      <p:sp>
-        <p:nvSpPr>
-          <p:cNvPr id="2" name="Slide Image Placeholder 1"/>
-          <p:cNvSpPr>
-            <a:spLocks noGrp="1"/>
-          </p:cNvSpPr>
-          <p:nvPr>
-            <p:ph type="sldImg" idx="2"/>
-          </p:nvPr>
-        </p:nvSpPr>
-        <p:spPr/>
-      </p:sp>
-      <p:sp>
-        <p:nvSpPr>
-          <p:cNvPr id="3" name="Notes Placeholder 2"/>
-          <p:cNvSpPr>
-            <a:spLocks noGrp="1"/>
-          </p:cNvSpPr>
-          <p:nvPr>
-            <p:ph type="body" idx="3" sz="quarter"/>
-          </p:nvPr>
-        </p:nvSpPr>
-        <p:spPr/>
-        <p:txBody>
-          <a:bodyPr/>
-          <a:lstStyle/>
-          <a:p>
-            <a:r>
-              <a:t>CI GitHub Actions : job qualité (ruff + 81 tests) à chaque push/PR ; job d'évaluation (pipeline complet fetch → preprocess → build_index → evaluate) déclenchable manuellement, artefacts publiés. Sources dédupliquées par identifiant d'événement avant la réponse.</a:t>
-            </a:r>
-          </a:p>
-        </p:txBody>
-      </p:sp>
-      <p:sp>
-        <p:nvSpPr>
-          <p:cNvPr id="4" name="Slide Number Placeholder 3"/>
-          <p:cNvSpPr>
-            <a:spLocks noGrp="1"/>
-          </p:cNvSpPr>
-          <p:nvPr>
-            <p:ph type="sldNum" idx="5" sz="quarter"/>
-          </p:nvPr>
-        </p:nvSpPr>
-        <p:spPr/>
-      </p:sp>
-    </p:spTree>
-  </p:cSld>
-  <p:clrMapOvr>
-    <a:masterClrMapping/>
-  </p:clrMapOvr>
-</p:notes>
-</file>
-
-<file path=ppt/notesSlides/notesSlide8.xml><?xml version="1.0" encoding="utf-8"?>
-<p:notes xmlns:a="http://schemas.openxmlformats.org/drawingml/2006/main" xmlns:p="http://schemas.openxmlformats.org/presentationml/2006/main" xmlns:r="http://schemas.openxmlformats.org/officeDocument/2006/relationships">
-  <p:cSld>
-    <p:spTree>
-      <p:nvGrpSpPr>
-        <p:cNvPr id="1" name=""/>
-        <p:cNvGrpSpPr/>
-        <p:nvPr/>
-      </p:nvGrpSpPr>
-      <p:grpSpPr>
-        <a:xfrm>
-          <a:off x="0" y="0"/>
-          <a:ext cx="0" cy="0"/>
-          <a:chOff x="0" y="0"/>
-          <a:chExt cx="0" cy="0"/>
-        </a:xfrm>
-      </p:grpSpPr>
-      <p:sp>
-        <p:nvSpPr>
-          <p:cNvPr id="2" name="Slide Image Placeholder 1"/>
-          <p:cNvSpPr>
-            <a:spLocks noGrp="1"/>
-          </p:cNvSpPr>
-          <p:nvPr>
-            <p:ph type="sldImg" idx="2"/>
-          </p:nvPr>
-        </p:nvSpPr>
-        <p:spPr/>
-      </p:sp>
-      <p:sp>
-        <p:nvSpPr>
-          <p:cNvPr id="3" name="Notes Placeholder 2"/>
-          <p:cNvSpPr>
-            <a:spLocks noGrp="1"/>
-          </p:cNvSpPr>
-          <p:nvPr>
-            <p:ph type="body" idx="3" sz="quarter"/>
-          </p:nvPr>
-        </p:nvSpPr>
-        <p:spPr/>
-        <p:txBody>
-          <a:bodyPr/>
-          <a:lstStyle/>
-          <a:p>
-            <a:r>
-              <a:t>Démo en direct : basculer vers Swagger /docs ; garder un scénario de refus.</a:t>
-            </a:r>
-          </a:p>
-        </p:txBody>
-      </p:sp>
-      <p:sp>
-        <p:nvSpPr>
-          <p:cNvPr id="4" name="Slide Number Placeholder 3"/>
-          <p:cNvSpPr>
-            <a:spLocks noGrp="1"/>
-          </p:cNvSpPr>
-          <p:nvPr>
-            <p:ph type="sldNum" idx="5" sz="quarter"/>
-          </p:nvPr>
-        </p:nvSpPr>
-        <p:spPr/>
-      </p:sp>
-    </p:spTree>
-  </p:cSld>
-  <p:clrMapOvr>
-    <a:masterClrMapping/>
-  </p:clrMapOvr>
-</p:notes>
-</file>
-
-<file path=ppt/notesSlides/notesSlide9.xml><?xml version="1.0" encoding="utf-8"?>
-<p:notes xmlns:a="http://schemas.openxmlformats.org/drawingml/2006/main" xmlns:p="http://schemas.openxmlformats.org/presentationml/2006/main" xmlns:r="http://schemas.openxmlformats.org/officeDocument/2006/relationships">
-  <p:cSld>
-    <p:spTree>
-      <p:nvGrpSpPr>
-        <p:cNvPr id="1" name=""/>
-        <p:cNvGrpSpPr/>
-        <p:nvPr/>
-      </p:nvGrpSpPr>
-      <p:grpSpPr>
-        <a:xfrm>
-          <a:off x="0" y="0"/>
-          <a:ext cx="0" cy="0"/>
-          <a:chOff x="0" y="0"/>
-          <a:chExt cx="0" cy="0"/>
-        </a:xfrm>
-      </p:grpSpPr>
-      <p:sp>
-        <p:nvSpPr>
-          <p:cNvPr id="2" name="Slide Image Placeholder 1"/>
-          <p:cNvSpPr>
-            <a:spLocks noGrp="1"/>
-          </p:cNvSpPr>
-          <p:nvPr>
-            <p:ph type="sldImg" idx="2"/>
-          </p:nvPr>
-        </p:nvSpPr>
-        <p:spPr/>
-      </p:sp>
-      <p:sp>
-        <p:nvSpPr>
-          <p:cNvPr id="3" name="Notes Placeholder 2"/>
-          <p:cNvSpPr>
-            <a:spLocks noGrp="1"/>
-          </p:cNvSpPr>
-          <p:nvPr>
-            <p:ph type="body" idx="3" sz="quarter"/>
-          </p:nvPr>
-        </p:nvSpPr>
-        <p:spPr/>
-        <p:txBody>
-          <a:bodyPr/>
-          <a:lstStyle/>
-          <a:p>
-            <a:r>
-              <a:t>Jeu annoté (20 questions, réponses fondées sur les événements réellement indexés), réévalué sur les données rafraîchies (filtrage temporel désactivé pour la reproductibilité). Métriques : similarité, couverture, classification (+ Ragas en option). Période n=2 (1 question = 50 %). Assumer le recul sur le hors-périmètre (artefact de métrique).</a:t>
-            </a:r>
-          </a:p>
-        </p:txBody>
-      </p:sp>
-      <p:sp>
-        <p:nvSpPr>
-          <p:cNvPr id="4" name="Slide Number Placeholder 3"/>
-          <p:cNvSpPr>
-            <a:spLocks noGrp="1"/>
-          </p:cNvSpPr>
-          <p:nvPr>
-            <p:ph type="sldNum" idx="5" sz="quarter"/>
-          </p:nvPr>
-        </p:nvSpPr>
-        <p:spPr/>
-      </p:sp>
-    </p:spTree>
-  </p:cSld>
-  <p:clrMapOvr>
-    <a:masterClrMapping/>
-  </p:clrMapOvr>
-</p:notes>
 </file>
 
 <file path=ppt/slideLayouts/slideLayout1.xml><?xml version="1.0" encoding="utf-8"?>
@@ -7079,7 +5889,7 @@
                 </a:solidFill>
                 <a:latin typeface="Calibri"/>
               </a:rPr>
-              <a:t>Rapport technique &amp; évaluation</a:t>
+              <a:t>Résultats d'évaluation</a:t>
             </a:r>
           </a:p>
         </p:txBody>
@@ -12053,7 +10863,7 @@
                 </a:solidFill>
                 <a:latin typeface="Calibri"/>
               </a:rPr>
-              <a:t>Choix · données &amp; embeddings · évaluation · limites · industrialisation.</a:t>
+              <a:t>Merci de votre attention — échanges &amp; discussion.</a:t>
             </a:r>
           </a:p>
         </p:txBody>
@@ -12438,7 +11248,7 @@
                 </a:solidFill>
                 <a:latin typeface="Calibri"/>
               </a:rPr>
-              <a:t>3 · Rapport technique &amp; résultats d'évaluation.</a:t>
+              <a:t>3 · Résultats d'évaluation.</a:t>
             </a:r>
           </a:p>
           <a:p>
@@ -12485,7 +11295,7 @@
                 </a:solidFill>
                 <a:latin typeface="Calibri"/>
               </a:rPr>
-              <a:t>–  </a:t>
+              <a:t>▸  </a:t>
             </a:r>
             <a:r>
               <a:rPr sz="1700" b="0">
@@ -12494,35 +11304,7 @@
                 </a:solidFill>
                 <a:latin typeface="Calibri"/>
               </a:rPr>
-              <a:t>Puis discussion : choix modèle/archi · données &amp; embeddings · évaluation ·</a:t>
-            </a:r>
-          </a:p>
-          <a:p>
-            <a:pPr algn="l">
-              <a:lnSpc>
-                <a:spcPct val="110000"/>
-              </a:lnSpc>
-              <a:spcAft>
-                <a:spcPts val="1200"/>
-              </a:spcAft>
-            </a:pPr>
-            <a:r>
-              <a:rPr sz="1700" b="1">
-                <a:solidFill>
-                  <a:srgbClr val="F59E0B"/>
-                </a:solidFill>
-                <a:latin typeface="Calibri"/>
-              </a:rPr>
-              <a:t>–  </a:t>
-            </a:r>
-            <a:r>
-              <a:rPr sz="1700" b="0">
-                <a:solidFill>
-                  <a:srgbClr val="374151"/>
-                </a:solidFill>
-                <a:latin typeface="Calibri"/>
-              </a:rPr>
-              <a:t>limites · reproductibilité, industrialisation &amp; usage métier.</a:t>
+              <a:t>5 · Échanges &amp; discussion.</a:t>
             </a:r>
           </a:p>
         </p:txBody>
@@ -13225,7 +12007,7 @@
                 </a:solidFill>
                 <a:latin typeface="Calibri"/>
               </a:rPr>
-              <a:t>Qu'est-ce qu'un système RAG  ? (sans jargon)</a:t>
+              <a:t>Qu'est-ce qu'un système RAG  ?</a:t>
             </a:r>
           </a:p>
         </p:txBody>
@@ -18638,324 +17420,4 @@
   </a:objectDefaults>
   <a:extraClrSchemeLst/>
 </a:theme>
-</file>
-
-<file path=ppt/theme/theme2.xml><?xml version="1.0" encoding="utf-8"?>
-<a:theme xmlns:a="http://schemas.openxmlformats.org/drawingml/2006/main" name="Office Theme">
-  <a:themeElements>
-    <a:clrScheme name="Office">
-      <a:dk1>
-        <a:sysClr val="windowText" lastClr="000000"/>
-      </a:dk1>
-      <a:lt1>
-        <a:sysClr val="window" lastClr="FFFFFF"/>
-      </a:lt1>
-      <a:dk2>
-        <a:srgbClr val="1F497D"/>
-      </a:dk2>
-      <a:lt2>
-        <a:srgbClr val="EEECE1"/>
-      </a:lt2>
-      <a:accent1>
-        <a:srgbClr val="4F81BD"/>
-      </a:accent1>
-      <a:accent2>
-        <a:srgbClr val="C0504D"/>
-      </a:accent2>
-      <a:accent3>
-        <a:srgbClr val="9BBB59"/>
-      </a:accent3>
-      <a:accent4>
-        <a:srgbClr val="8064A2"/>
-      </a:accent4>
-      <a:accent5>
-        <a:srgbClr val="4BACC6"/>
-      </a:accent5>
-      <a:accent6>
-        <a:srgbClr val="F79646"/>
-      </a:accent6>
-      <a:hlink>
-        <a:srgbClr val="0000FF"/>
-      </a:hlink>
-      <a:folHlink>
-        <a:srgbClr val="800080"/>
-      </a:folHlink>
-    </a:clrScheme>
-    <a:fontScheme name="Office">
-      <a:majorFont>
-        <a:latin typeface="Calibri"/>
-        <a:ea typeface=""/>
-        <a:cs typeface=""/>
-        <a:font script="Jpan" typeface="ＭＳ Ｐゴシック"/>
-        <a:font script="Hang" typeface="맑은 고딕"/>
-        <a:font script="Hans" typeface="宋体"/>
-        <a:font script="Hant" typeface="新細明體"/>
-        <a:font script="Arab" typeface="Times New Roman"/>
-        <a:font script="Hebr" typeface="Times New Roman"/>
-        <a:font script="Thai" typeface="Angsana New"/>
-        <a:font script="Ethi" typeface="Nyala"/>
-        <a:font script="Beng" typeface="Vrinda"/>
-        <a:font script="Gujr" typeface="Shruti"/>
-        <a:font script="Khmr" typeface="MoolBoran"/>
-        <a:font script="Knda" typeface="Tunga"/>
-        <a:font script="Guru" typeface="Raavi"/>
-        <a:font script="Cans" typeface="Euphemia"/>
-        <a:font script="Cher" typeface="Plantagenet Cherokee"/>
-        <a:font script="Yiii" typeface="Microsoft Yi Baiti"/>
-        <a:font script="Tibt" typeface="Microsoft Himalaya"/>
-        <a:font script="Thaa" typeface="MV Boli"/>
-        <a:font script="Deva" typeface="Mangal"/>
-        <a:font script="Telu" typeface="Gautami"/>
-        <a:font script="Taml" typeface="Latha"/>
-        <a:font script="Syrc" typeface="Estrangelo Edessa"/>
-        <a:font script="Orya" typeface="Kalinga"/>
-        <a:font script="Mlym" typeface="Kartika"/>
-        <a:font script="Laoo" typeface="DokChampa"/>
-        <a:font script="Sinh" typeface="Iskoola Pota"/>
-        <a:font script="Mong" typeface="Mongolian Baiti"/>
-        <a:font script="Viet" typeface="Times New Roman"/>
-        <a:font script="Uigh" typeface="Microsoft Uighur"/>
-        <a:font script="Geor" typeface="Sylfaen"/>
-      </a:majorFont>
-      <a:minorFont>
-        <a:latin typeface="Calibri"/>
-        <a:ea typeface=""/>
-        <a:cs typeface=""/>
-        <a:font script="Jpan" typeface="ＭＳ Ｐゴシック"/>
-        <a:font script="Hang" typeface="맑은 고딕"/>
-        <a:font script="Hans" typeface="宋体"/>
-        <a:font script="Hant" typeface="新細明體"/>
-        <a:font script="Arab" typeface="Arial"/>
-        <a:font script="Hebr" typeface="Arial"/>
-        <a:font script="Thai" typeface="Cordia New"/>
-        <a:font script="Ethi" typeface="Nyala"/>
-        <a:font script="Beng" typeface="Vrinda"/>
-        <a:font script="Gujr" typeface="Shruti"/>
-        <a:font script="Khmr" typeface="DaunPenh"/>
-        <a:font script="Knda" typeface="Tunga"/>
-        <a:font script="Guru" typeface="Raavi"/>
-        <a:font script="Cans" typeface="Euphemia"/>
-        <a:font script="Cher" typeface="Plantagenet Cherokee"/>
-        <a:font script="Yiii" typeface="Microsoft Yi Baiti"/>
-        <a:font script="Tibt" typeface="Microsoft Himalaya"/>
-        <a:font script="Thaa" typeface="MV Boli"/>
-        <a:font script="Deva" typeface="Mangal"/>
-        <a:font script="Telu" typeface="Gautami"/>
-        <a:font script="Taml" typeface="Latha"/>
-        <a:font script="Syrc" typeface="Estrangelo Edessa"/>
-        <a:font script="Orya" typeface="Kalinga"/>
-        <a:font script="Mlym" typeface="Kartika"/>
-        <a:font script="Laoo" typeface="DokChampa"/>
-        <a:font script="Sinh" typeface="Iskoola Pota"/>
-        <a:font script="Mong" typeface="Mongolian Baiti"/>
-        <a:font script="Viet" typeface="Arial"/>
-        <a:font script="Uigh" typeface="Microsoft Uighur"/>
-        <a:font script="Geor" typeface="Sylfaen"/>
-      </a:minorFont>
-    </a:fontScheme>
-    <a:fmtScheme name="Office">
-      <a:fillStyleLst>
-        <a:solidFill>
-          <a:schemeClr val="phClr"/>
-        </a:solidFill>
-        <a:gradFill rotWithShape="1">
-          <a:gsLst>
-            <a:gs pos="0">
-              <a:schemeClr val="phClr">
-                <a:tint val="50000"/>
-                <a:satMod val="300000"/>
-              </a:schemeClr>
-            </a:gs>
-            <a:gs pos="35000">
-              <a:schemeClr val="phClr">
-                <a:tint val="37000"/>
-                <a:satMod val="300000"/>
-              </a:schemeClr>
-            </a:gs>
-            <a:gs pos="100000">
-              <a:schemeClr val="phClr">
-                <a:tint val="15000"/>
-                <a:satMod val="350000"/>
-              </a:schemeClr>
-            </a:gs>
-          </a:gsLst>
-          <a:lin ang="16200000" scaled="1"/>
-        </a:gradFill>
-        <a:gradFill rotWithShape="1">
-          <a:gsLst>
-            <a:gs pos="0">
-              <a:schemeClr val="phClr">
-                <a:tint val="100000"/>
-                <a:shade val="100000"/>
-                <a:satMod val="130000"/>
-              </a:schemeClr>
-            </a:gs>
-            <a:gs pos="100000">
-              <a:schemeClr val="phClr">
-                <a:tint val="50000"/>
-                <a:shade val="100000"/>
-                <a:satMod val="350000"/>
-              </a:schemeClr>
-            </a:gs>
-          </a:gsLst>
-          <a:lin ang="16200000" scaled="0"/>
-        </a:gradFill>
-      </a:fillStyleLst>
-      <a:lnStyleLst>
-        <a:ln w="9525" cap="flat" cmpd="sng" algn="ctr">
-          <a:solidFill>
-            <a:schemeClr val="phClr">
-              <a:shade val="95000"/>
-              <a:satMod val="105000"/>
-            </a:schemeClr>
-          </a:solidFill>
-          <a:prstDash val="solid"/>
-        </a:ln>
-        <a:ln w="25400" cap="flat" cmpd="sng" algn="ctr">
-          <a:solidFill>
-            <a:schemeClr val="phClr"/>
-          </a:solidFill>
-          <a:prstDash val="solid"/>
-        </a:ln>
-        <a:ln w="38100" cap="flat" cmpd="sng" algn="ctr">
-          <a:solidFill>
-            <a:schemeClr val="phClr"/>
-          </a:solidFill>
-          <a:prstDash val="solid"/>
-        </a:ln>
-      </a:lnStyleLst>
-      <a:effectStyleLst>
-        <a:effectStyle>
-          <a:effectLst>
-            <a:outerShdw blurRad="40000" dist="20000" dir="5400000" rotWithShape="0">
-              <a:srgbClr val="000000">
-                <a:alpha val="38000"/>
-              </a:srgbClr>
-            </a:outerShdw>
-          </a:effectLst>
-        </a:effectStyle>
-        <a:effectStyle>
-          <a:effectLst>
-            <a:outerShdw blurRad="40000" dist="23000" dir="5400000" rotWithShape="0">
-              <a:srgbClr val="000000">
-                <a:alpha val="35000"/>
-              </a:srgbClr>
-            </a:outerShdw>
-          </a:effectLst>
-        </a:effectStyle>
-        <a:effectStyle>
-          <a:effectLst>
-            <a:outerShdw blurRad="40000" dist="23000" dir="5400000" rotWithShape="0">
-              <a:srgbClr val="000000">
-                <a:alpha val="35000"/>
-              </a:srgbClr>
-            </a:outerShdw>
-          </a:effectLst>
-          <a:scene3d>
-            <a:camera prst="orthographicFront">
-              <a:rot lat="0" lon="0" rev="0"/>
-            </a:camera>
-            <a:lightRig rig="threePt" dir="t">
-              <a:rot lat="0" lon="0" rev="1200000"/>
-            </a:lightRig>
-          </a:scene3d>
-          <a:sp3d>
-            <a:bevelT w="63500" h="25400"/>
-          </a:sp3d>
-        </a:effectStyle>
-      </a:effectStyleLst>
-      <a:bgFillStyleLst>
-        <a:solidFill>
-          <a:schemeClr val="phClr"/>
-        </a:solidFill>
-        <a:gradFill rotWithShape="1">
-          <a:gsLst>
-            <a:gs pos="0">
-              <a:schemeClr val="phClr">
-                <a:tint val="40000"/>
-                <a:satMod val="350000"/>
-              </a:schemeClr>
-            </a:gs>
-            <a:gs pos="40000">
-              <a:schemeClr val="phClr">
-                <a:tint val="45000"/>
-                <a:shade val="99000"/>
-                <a:satMod val="350000"/>
-              </a:schemeClr>
-            </a:gs>
-            <a:gs pos="100000">
-              <a:schemeClr val="phClr">
-                <a:shade val="20000"/>
-                <a:satMod val="255000"/>
-              </a:schemeClr>
-            </a:gs>
-          </a:gsLst>
-          <a:path path="circle">
-            <a:fillToRect l="50000" t="-80000" r="50000" b="180000"/>
-          </a:path>
-        </a:gradFill>
-        <a:gradFill rotWithShape="1">
-          <a:gsLst>
-            <a:gs pos="0">
-              <a:schemeClr val="phClr">
-                <a:tint val="80000"/>
-                <a:satMod val="300000"/>
-              </a:schemeClr>
-            </a:gs>
-            <a:gs pos="100000">
-              <a:schemeClr val="phClr">
-                <a:shade val="30000"/>
-                <a:satMod val="200000"/>
-              </a:schemeClr>
-            </a:gs>
-          </a:gsLst>
-          <a:path path="circle">
-            <a:fillToRect l="50000" t="50000" r="50000" b="50000"/>
-          </a:path>
-        </a:gradFill>
-      </a:bgFillStyleLst>
-    </a:fmtScheme>
-  </a:themeElements>
-  <a:objectDefaults>
-    <a:spDef>
-      <a:spPr/>
-      <a:bodyPr/>
-      <a:lstStyle/>
-      <a:style>
-        <a:lnRef idx="1">
-          <a:schemeClr val="accent1"/>
-        </a:lnRef>
-        <a:fillRef idx="3">
-          <a:schemeClr val="accent1"/>
-        </a:fillRef>
-        <a:effectRef idx="2">
-          <a:schemeClr val="accent1"/>
-        </a:effectRef>
-        <a:fontRef idx="minor">
-          <a:schemeClr val="lt1"/>
-        </a:fontRef>
-      </a:style>
-    </a:spDef>
-    <a:lnDef>
-      <a:spPr/>
-      <a:bodyPr/>
-      <a:lstStyle/>
-      <a:style>
-        <a:lnRef idx="2">
-          <a:schemeClr val="accent1"/>
-        </a:lnRef>
-        <a:fillRef idx="0">
-          <a:schemeClr val="accent1"/>
-        </a:fillRef>
-        <a:effectRef idx="1">
-          <a:schemeClr val="accent1"/>
-        </a:effectRef>
-        <a:fontRef idx="minor">
-          <a:schemeClr val="tx1"/>
-        </a:fontRef>
-      </a:style>
-    </a:lnDef>
-  </a:objectDefaults>
-  <a:extraClrSchemeLst/>
-</a:theme>
 </file>
--- a/docs/presentation.pptx
+++ b/docs/presentation.pptx
@@ -5130,7 +5130,7 @@
                 </a:solidFill>
                 <a:latin typeface="Calibri"/>
               </a:rPr>
-              <a:t>81 tests automatisés (unitaires + API).</a:t>
+              <a:t>82 tests automatisés (unitaires + API).</a:t>
             </a:r>
           </a:p>
           <a:p>
@@ -8145,7 +8145,7 @@
                 </a:solidFill>
                 <a:latin typeface="Consolas"/>
               </a:rPr>
-              <a:t>├── tests/       81 tests (10 fichiers)</a:t>
+              <a:t>├── tests/       82 tests (10 fichiers)</a:t>
             </a:r>
           </a:p>
           <a:p>
